--- a/samples/Shruti_Revolut_WhyHireMe_Portfolio.pptx
+++ b/samples/Shruti_Revolut_WhyHireMe_Portfolio.pptx
@@ -116,269 +116,6 @@
 </file>
 
 <file path=ppt/charts/chart1.xml><?xml version="1.0" encoding="utf-8"?>
-<c:chartSpace xmlns:c="http://schemas.openxmlformats.org/drawingml/2006/chart" xmlns:a="http://schemas.openxmlformats.org/drawingml/2006/main" xmlns:r="http://schemas.openxmlformats.org/officeDocument/2006/relationships">
-  <c:date1904 val="0"/>
-  <c:chart>
-    <c:autoTitleDeleted val="0"/>
-    <c:plotArea>
-      <c:barChart>
-        <c:barDir val="bar"/>
-        <c:grouping val="clustered"/>
-        <c:ser>
-          <c:idx val="0"/>
-          <c:order val="0"/>
-          <c:tx>
-            <c:strRef>
-              <c:f>Sheet1!$B$1</c:f>
-              <c:strCache>
-                <c:ptCount val="1"/>
-                <c:pt idx="0">
-                  <c:v>JD Requirement</c:v>
-                </c:pt>
-              </c:strCache>
-            </c:strRef>
-          </c:tx>
-          <c:spPr>
-            <a:solidFill>
-              <a:srgbClr val="5A5A5E"/>
-            </a:solidFill>
-          </c:spPr>
-          <c:cat>
-            <c:strRef>
-              <c:f>Sheet1!$A$2:$A$7</c:f>
-              <c:strCache>
-                <c:ptCount val="6"/>
-                <c:pt idx="0">
-                  <c:v>Product strategy
-&amp; roadmaps</c:v>
-                </c:pt>
-                <c:pt idx="1">
-                  <c:v>Data analysis
-&amp; user insights</c:v>
-                </c:pt>
-                <c:pt idx="2">
-                  <c:v>Cross-functional
-collaboration</c:v>
-                </c:pt>
-                <c:pt idx="3">
-                  <c:v>User testing
-&amp; iteration</c:v>
-                </c:pt>
-                <c:pt idx="4">
-                  <c:v>Tracking &amp;
-communication</c:v>
-                </c:pt>
-                <c:pt idx="5">
-                  <c:v>Startup /
-entrepreneurial</c:v>
-                </c:pt>
-              </c:strCache>
-            </c:strRef>
-          </c:cat>
-          <c:val>
-            <c:numRef>
-              <c:f>Sheet1!$B$2:$B$7</c:f>
-              <c:numCache>
-                <c:formatCode>General</c:formatCode>
-                <c:ptCount val="6"/>
-                <c:pt idx="0">
-                  <c:v>10</c:v>
-                </c:pt>
-                <c:pt idx="1">
-                  <c:v>10</c:v>
-                </c:pt>
-                <c:pt idx="2">
-                  <c:v>10</c:v>
-                </c:pt>
-                <c:pt idx="3">
-                  <c:v>10</c:v>
-                </c:pt>
-                <c:pt idx="4">
-                  <c:v>10</c:v>
-                </c:pt>
-                <c:pt idx="5">
-                  <c:v>5</c:v>
-                </c:pt>
-              </c:numCache>
-            </c:numRef>
-          </c:val>
-        </c:ser>
-        <c:ser>
-          <c:idx val="1"/>
-          <c:order val="1"/>
-          <c:tx>
-            <c:strRef>
-              <c:f>Sheet1!$C$1</c:f>
-              <c:strCache>
-                <c:ptCount val="1"/>
-                <c:pt idx="0">
-                  <c:v>Shruti Evidence</c:v>
-                </c:pt>
-              </c:strCache>
-            </c:strRef>
-          </c:tx>
-          <c:spPr>
-            <a:solidFill>
-              <a:srgbClr val="0066FF"/>
-            </a:solidFill>
-          </c:spPr>
-          <c:cat>
-            <c:strRef>
-              <c:f>Sheet1!$A$2:$A$7</c:f>
-              <c:strCache>
-                <c:ptCount val="6"/>
-                <c:pt idx="0">
-                  <c:v>Product strategy
-&amp; roadmaps</c:v>
-                </c:pt>
-                <c:pt idx="1">
-                  <c:v>Data analysis
-&amp; user insights</c:v>
-                </c:pt>
-                <c:pt idx="2">
-                  <c:v>Cross-functional
-collaboration</c:v>
-                </c:pt>
-                <c:pt idx="3">
-                  <c:v>User testing
-&amp; iteration</c:v>
-                </c:pt>
-                <c:pt idx="4">
-                  <c:v>Tracking &amp;
-communication</c:v>
-                </c:pt>
-                <c:pt idx="5">
-                  <c:v>Startup /
-entrepreneurial</c:v>
-                </c:pt>
-              </c:strCache>
-            </c:strRef>
-          </c:cat>
-          <c:val>
-            <c:numRef>
-              <c:f>Sheet1!$C$2:$C$7</c:f>
-              <c:numCache>
-                <c:formatCode>General</c:formatCode>
-                <c:ptCount val="6"/>
-                <c:pt idx="0">
-                  <c:v>9</c:v>
-                </c:pt>
-                <c:pt idx="1">
-                  <c:v>9</c:v>
-                </c:pt>
-                <c:pt idx="2">
-                  <c:v>10</c:v>
-                </c:pt>
-                <c:pt idx="3">
-                  <c:v>8</c:v>
-                </c:pt>
-                <c:pt idx="4">
-                  <c:v>9</c:v>
-                </c:pt>
-                <c:pt idx="5">
-                  <c:v>10</c:v>
-                </c:pt>
-              </c:numCache>
-            </c:numRef>
-          </c:val>
-        </c:ser>
-        <c:axId val="-2068027336"/>
-        <c:axId val="-2113994440"/>
-      </c:barChart>
-      <c:catAx>
-        <c:axId val="-2068027336"/>
-        <c:scaling>
-          <c:orientation val="minMax"/>
-        </c:scaling>
-        <c:delete val="0"/>
-        <c:axPos val="l"/>
-        <c:majorTickMark val="out"/>
-        <c:minorTickMark val="none"/>
-        <c:tickLblPos val="nextTo"/>
-        <c:txPr>
-          <a:bodyPr/>
-          <a:lstStyle/>
-          <a:p>
-            <a:pPr>
-              <a:defRPr sz="800">
-                <a:solidFill>
-                  <a:srgbClr val="A0A0A0"/>
-                </a:solidFill>
-                <a:latin typeface="Inter"/>
-              </a:defRPr>
-            </a:pPr>
-          </a:p>
-        </c:txPr>
-        <c:crossAx val="-2113994440"/>
-        <c:crosses val="autoZero"/>
-        <c:auto val="1"/>
-        <c:lblAlgn val="ctr"/>
-        <c:lblOffset val="100"/>
-        <c:noMultiLvlLbl val="0"/>
-      </c:catAx>
-      <c:valAx>
-        <c:axId val="-2113994440"/>
-        <c:scaling/>
-        <c:delete val="0"/>
-        <c:axPos val="b"/>
-        <c:majorGridlines/>
-        <c:majorTickMark val="out"/>
-        <c:minorTickMark val="none"/>
-        <c:tickLblPos val="nextTo"/>
-        <c:txPr>
-          <a:bodyPr/>
-          <a:lstStyle/>
-          <a:p>
-            <a:pPr>
-              <a:defRPr sz="800">
-                <a:solidFill>
-                  <a:srgbClr val="A0A0A0"/>
-                </a:solidFill>
-                <a:latin typeface="Inter"/>
-              </a:defRPr>
-            </a:pPr>
-          </a:p>
-        </c:txPr>
-        <c:crossAx val="-2068027336"/>
-        <c:crosses val="autoZero"/>
-      </c:valAx>
-    </c:plotArea>
-    <c:legend>
-      <c:legendPos val="b"/>
-      <c:overlay val="0"/>
-      <c:txPr>
-        <a:bodyPr/>
-        <a:lstStyle/>
-        <a:p>
-          <a:pPr>
-            <a:defRPr sz="800">
-              <a:solidFill>
-                <a:srgbClr val="A0A0A0"/>
-              </a:solidFill>
-            </a:defRPr>
-          </a:pPr>
-        </a:p>
-      </c:txPr>
-    </c:legend>
-    <c:dispBlanksAs val="gap"/>
-  </c:chart>
-  <c:txPr>
-    <a:bodyPr/>
-    <a:lstStyle/>
-    <a:p>
-      <a:pPr>
-        <a:defRPr sz="1800"/>
-      </a:pPr>
-      <a:endParaRPr lang="en-US"/>
-    </a:p>
-  </c:txPr>
-  <c:externalData r:id="rId1">
-    <c:autoUpdate val="0"/>
-  </c:externalData>
-</c:chartSpace>
-</file>
-
-<file path=ppt/charts/chart2.xml><?xml version="1.0" encoding="utf-8"?>
 <c:chartSpace xmlns:c="http://schemas.openxmlformats.org/drawingml/2006/chart" xmlns:a="http://schemas.openxmlformats.org/drawingml/2006/main" xmlns:r="http://schemas.openxmlformats.org/officeDocument/2006/relationships">
   <c:date1904 val="0"/>
   <c:roundedCorners val="0"/>
@@ -4427,24 +4164,50 @@
           </a:p>
         </p:txBody>
       </p:sp>
-      <p:graphicFrame>
-        <p:nvGraphicFramePr>
-          <p:cNvPr id="4" name="Chart 3"/>
-          <p:cNvGraphicFramePr>
-            <a:graphicFrameLocks noGrp="1"/>
-          </p:cNvGraphicFramePr>
-          <p:nvPr/>
-        </p:nvGraphicFramePr>
-        <p:xfrm>
-          <a:off x="274320" y="914400"/>
-          <a:ext cx="5486400" cy="3840480"/>
-        </p:xfrm>
-        <a:graphic>
-          <a:graphicData uri="http://schemas.openxmlformats.org/drawingml/2006/chart">
-            <c:chart xmlns:c="http://schemas.openxmlformats.org/drawingml/2006/chart" r:id="rId3"/>
-          </a:graphicData>
-        </a:graphic>
-      </p:graphicFrame>
+      <p:sp>
+        <p:nvSpPr>
+          <p:cNvPr id="4" name="Rectangle 3"/>
+          <p:cNvSpPr/>
+          <p:nvPr/>
+        </p:nvSpPr>
+        <p:spPr>
+          <a:xfrm>
+            <a:off x="731520" y="3931920"/>
+            <a:ext cx="5522975" cy="2743"/>
+          </a:xfrm>
+          <a:prstGeom prst="rect">
+            <a:avLst/>
+          </a:prstGeom>
+          <a:solidFill>
+            <a:srgbClr val="2C2C2E"/>
+          </a:solidFill>
+          <a:ln>
+            <a:noFill/>
+          </a:ln>
+          <a:effectLst/>
+        </p:spPr>
+        <p:style>
+          <a:lnRef idx="1">
+            <a:schemeClr val="accent1"/>
+          </a:lnRef>
+          <a:fillRef idx="3">
+            <a:schemeClr val="accent1"/>
+          </a:fillRef>
+          <a:effectRef idx="2">
+            <a:schemeClr val="accent1"/>
+          </a:effectRef>
+          <a:fontRef idx="minor">
+            <a:schemeClr val="lt1"/>
+          </a:fontRef>
+        </p:style>
+        <p:txBody>
+          <a:bodyPr rtlCol="0" anchor="ctr"/>
+          <a:lstStyle/>
+          <a:p>
+            <a:pPr algn="ctr"/>
+          </a:p>
+        </p:txBody>
+      </p:sp>
       <p:sp>
         <p:nvSpPr>
           <p:cNvPr id="5" name="TextBox 4"/>
@@ -4453,8 +4216,1780 @@
         </p:nvSpPr>
         <p:spPr>
           <a:xfrm>
-            <a:off x="5943600" y="1097280"/>
-            <a:ext cx="2926080" cy="274320"/>
+            <a:off x="137160" y="3840480"/>
+            <a:ext cx="502920" cy="182880"/>
+          </a:xfrm>
+          <a:prstGeom prst="rect">
+            <a:avLst/>
+          </a:prstGeom>
+          <a:noFill/>
+        </p:spPr>
+        <p:txBody>
+          <a:bodyPr wrap="square" tIns="0" bIns="0" lIns="0" rIns="0">
+            <a:spAutoFit/>
+          </a:bodyPr>
+          <a:lstStyle/>
+          <a:p>
+            <a:pPr algn="r">
+              <a:defRPr sz="700" b="0">
+                <a:solidFill>
+                  <a:srgbClr val="6B6B6B"/>
+                </a:solidFill>
+                <a:latin typeface="Inter"/>
+              </a:defRPr>
+            </a:pPr>
+            <a:r>
+              <a:t>0</a:t>
+            </a:r>
+          </a:p>
+        </p:txBody>
+      </p:sp>
+      <p:sp>
+        <p:nvSpPr>
+          <p:cNvPr id="6" name="Rectangle 5"/>
+          <p:cNvSpPr/>
+          <p:nvPr/>
+        </p:nvSpPr>
+        <p:spPr>
+          <a:xfrm>
+            <a:off x="731520" y="3364991"/>
+            <a:ext cx="5522975" cy="2743"/>
+          </a:xfrm>
+          <a:prstGeom prst="rect">
+            <a:avLst/>
+          </a:prstGeom>
+          <a:solidFill>
+            <a:srgbClr val="2C2C2E"/>
+          </a:solidFill>
+          <a:ln>
+            <a:noFill/>
+          </a:ln>
+          <a:effectLst/>
+        </p:spPr>
+        <p:style>
+          <a:lnRef idx="1">
+            <a:schemeClr val="accent1"/>
+          </a:lnRef>
+          <a:fillRef idx="3">
+            <a:schemeClr val="accent1"/>
+          </a:fillRef>
+          <a:effectRef idx="2">
+            <a:schemeClr val="accent1"/>
+          </a:effectRef>
+          <a:fontRef idx="minor">
+            <a:schemeClr val="lt1"/>
+          </a:fontRef>
+        </p:style>
+        <p:txBody>
+          <a:bodyPr rtlCol="0" anchor="ctr"/>
+          <a:lstStyle/>
+          <a:p>
+            <a:pPr algn="ctr"/>
+          </a:p>
+        </p:txBody>
+      </p:sp>
+      <p:sp>
+        <p:nvSpPr>
+          <p:cNvPr id="7" name="TextBox 6"/>
+          <p:cNvSpPr txBox="1"/>
+          <p:nvPr/>
+        </p:nvSpPr>
+        <p:spPr>
+          <a:xfrm>
+            <a:off x="137160" y="3273551"/>
+            <a:ext cx="502920" cy="182880"/>
+          </a:xfrm>
+          <a:prstGeom prst="rect">
+            <a:avLst/>
+          </a:prstGeom>
+          <a:noFill/>
+        </p:spPr>
+        <p:txBody>
+          <a:bodyPr wrap="square" tIns="0" bIns="0" lIns="0" rIns="0">
+            <a:spAutoFit/>
+          </a:bodyPr>
+          <a:lstStyle/>
+          <a:p>
+            <a:pPr algn="r">
+              <a:defRPr sz="700" b="0">
+                <a:solidFill>
+                  <a:srgbClr val="6B6B6B"/>
+                </a:solidFill>
+                <a:latin typeface="Inter"/>
+              </a:defRPr>
+            </a:pPr>
+            <a:r>
+              <a:t>2</a:t>
+            </a:r>
+          </a:p>
+        </p:txBody>
+      </p:sp>
+      <p:sp>
+        <p:nvSpPr>
+          <p:cNvPr id="8" name="Rectangle 7"/>
+          <p:cNvSpPr/>
+          <p:nvPr/>
+        </p:nvSpPr>
+        <p:spPr>
+          <a:xfrm>
+            <a:off x="731520" y="2798063"/>
+            <a:ext cx="5522975" cy="2743"/>
+          </a:xfrm>
+          <a:prstGeom prst="rect">
+            <a:avLst/>
+          </a:prstGeom>
+          <a:solidFill>
+            <a:srgbClr val="2C2C2E"/>
+          </a:solidFill>
+          <a:ln>
+            <a:noFill/>
+          </a:ln>
+          <a:effectLst/>
+        </p:spPr>
+        <p:style>
+          <a:lnRef idx="1">
+            <a:schemeClr val="accent1"/>
+          </a:lnRef>
+          <a:fillRef idx="3">
+            <a:schemeClr val="accent1"/>
+          </a:fillRef>
+          <a:effectRef idx="2">
+            <a:schemeClr val="accent1"/>
+          </a:effectRef>
+          <a:fontRef idx="minor">
+            <a:schemeClr val="lt1"/>
+          </a:fontRef>
+        </p:style>
+        <p:txBody>
+          <a:bodyPr rtlCol="0" anchor="ctr"/>
+          <a:lstStyle/>
+          <a:p>
+            <a:pPr algn="ctr"/>
+          </a:p>
+        </p:txBody>
+      </p:sp>
+      <p:sp>
+        <p:nvSpPr>
+          <p:cNvPr id="9" name="TextBox 8"/>
+          <p:cNvSpPr txBox="1"/>
+          <p:nvPr/>
+        </p:nvSpPr>
+        <p:spPr>
+          <a:xfrm>
+            <a:off x="137160" y="2706623"/>
+            <a:ext cx="502920" cy="182880"/>
+          </a:xfrm>
+          <a:prstGeom prst="rect">
+            <a:avLst/>
+          </a:prstGeom>
+          <a:noFill/>
+        </p:spPr>
+        <p:txBody>
+          <a:bodyPr wrap="square" tIns="0" bIns="0" lIns="0" rIns="0">
+            <a:spAutoFit/>
+          </a:bodyPr>
+          <a:lstStyle/>
+          <a:p>
+            <a:pPr algn="r">
+              <a:defRPr sz="700" b="0">
+                <a:solidFill>
+                  <a:srgbClr val="6B6B6B"/>
+                </a:solidFill>
+                <a:latin typeface="Inter"/>
+              </a:defRPr>
+            </a:pPr>
+            <a:r>
+              <a:t>4</a:t>
+            </a:r>
+          </a:p>
+        </p:txBody>
+      </p:sp>
+      <p:sp>
+        <p:nvSpPr>
+          <p:cNvPr id="10" name="Rectangle 9"/>
+          <p:cNvSpPr/>
+          <p:nvPr/>
+        </p:nvSpPr>
+        <p:spPr>
+          <a:xfrm>
+            <a:off x="731520" y="2231136"/>
+            <a:ext cx="5522975" cy="2743"/>
+          </a:xfrm>
+          <a:prstGeom prst="rect">
+            <a:avLst/>
+          </a:prstGeom>
+          <a:solidFill>
+            <a:srgbClr val="2C2C2E"/>
+          </a:solidFill>
+          <a:ln>
+            <a:noFill/>
+          </a:ln>
+          <a:effectLst/>
+        </p:spPr>
+        <p:style>
+          <a:lnRef idx="1">
+            <a:schemeClr val="accent1"/>
+          </a:lnRef>
+          <a:fillRef idx="3">
+            <a:schemeClr val="accent1"/>
+          </a:fillRef>
+          <a:effectRef idx="2">
+            <a:schemeClr val="accent1"/>
+          </a:effectRef>
+          <a:fontRef idx="minor">
+            <a:schemeClr val="lt1"/>
+          </a:fontRef>
+        </p:style>
+        <p:txBody>
+          <a:bodyPr rtlCol="0" anchor="ctr"/>
+          <a:lstStyle/>
+          <a:p>
+            <a:pPr algn="ctr"/>
+          </a:p>
+        </p:txBody>
+      </p:sp>
+      <p:sp>
+        <p:nvSpPr>
+          <p:cNvPr id="11" name="TextBox 10"/>
+          <p:cNvSpPr txBox="1"/>
+          <p:nvPr/>
+        </p:nvSpPr>
+        <p:spPr>
+          <a:xfrm>
+            <a:off x="137160" y="2139696"/>
+            <a:ext cx="502920" cy="182880"/>
+          </a:xfrm>
+          <a:prstGeom prst="rect">
+            <a:avLst/>
+          </a:prstGeom>
+          <a:noFill/>
+        </p:spPr>
+        <p:txBody>
+          <a:bodyPr wrap="square" tIns="0" bIns="0" lIns="0" rIns="0">
+            <a:spAutoFit/>
+          </a:bodyPr>
+          <a:lstStyle/>
+          <a:p>
+            <a:pPr algn="r">
+              <a:defRPr sz="700" b="0">
+                <a:solidFill>
+                  <a:srgbClr val="6B6B6B"/>
+                </a:solidFill>
+                <a:latin typeface="Inter"/>
+              </a:defRPr>
+            </a:pPr>
+            <a:r>
+              <a:t>6</a:t>
+            </a:r>
+          </a:p>
+        </p:txBody>
+      </p:sp>
+      <p:sp>
+        <p:nvSpPr>
+          <p:cNvPr id="12" name="Rectangle 11"/>
+          <p:cNvSpPr/>
+          <p:nvPr/>
+        </p:nvSpPr>
+        <p:spPr>
+          <a:xfrm>
+            <a:off x="731520" y="1664207"/>
+            <a:ext cx="5522975" cy="2743"/>
+          </a:xfrm>
+          <a:prstGeom prst="rect">
+            <a:avLst/>
+          </a:prstGeom>
+          <a:solidFill>
+            <a:srgbClr val="2C2C2E"/>
+          </a:solidFill>
+          <a:ln>
+            <a:noFill/>
+          </a:ln>
+          <a:effectLst/>
+        </p:spPr>
+        <p:style>
+          <a:lnRef idx="1">
+            <a:schemeClr val="accent1"/>
+          </a:lnRef>
+          <a:fillRef idx="3">
+            <a:schemeClr val="accent1"/>
+          </a:fillRef>
+          <a:effectRef idx="2">
+            <a:schemeClr val="accent1"/>
+          </a:effectRef>
+          <a:fontRef idx="minor">
+            <a:schemeClr val="lt1"/>
+          </a:fontRef>
+        </p:style>
+        <p:txBody>
+          <a:bodyPr rtlCol="0" anchor="ctr"/>
+          <a:lstStyle/>
+          <a:p>
+            <a:pPr algn="ctr"/>
+          </a:p>
+        </p:txBody>
+      </p:sp>
+      <p:sp>
+        <p:nvSpPr>
+          <p:cNvPr id="13" name="TextBox 12"/>
+          <p:cNvSpPr txBox="1"/>
+          <p:nvPr/>
+        </p:nvSpPr>
+        <p:spPr>
+          <a:xfrm>
+            <a:off x="137160" y="1572767"/>
+            <a:ext cx="502920" cy="182880"/>
+          </a:xfrm>
+          <a:prstGeom prst="rect">
+            <a:avLst/>
+          </a:prstGeom>
+          <a:noFill/>
+        </p:spPr>
+        <p:txBody>
+          <a:bodyPr wrap="square" tIns="0" bIns="0" lIns="0" rIns="0">
+            <a:spAutoFit/>
+          </a:bodyPr>
+          <a:lstStyle/>
+          <a:p>
+            <a:pPr algn="r">
+              <a:defRPr sz="700" b="0">
+                <a:solidFill>
+                  <a:srgbClr val="6B6B6B"/>
+                </a:solidFill>
+                <a:latin typeface="Inter"/>
+              </a:defRPr>
+            </a:pPr>
+            <a:r>
+              <a:t>8</a:t>
+            </a:r>
+          </a:p>
+        </p:txBody>
+      </p:sp>
+      <p:sp>
+        <p:nvSpPr>
+          <p:cNvPr id="14" name="Rectangle 13"/>
+          <p:cNvSpPr/>
+          <p:nvPr/>
+        </p:nvSpPr>
+        <p:spPr>
+          <a:xfrm>
+            <a:off x="731520" y="1097280"/>
+            <a:ext cx="5522975" cy="2743"/>
+          </a:xfrm>
+          <a:prstGeom prst="rect">
+            <a:avLst/>
+          </a:prstGeom>
+          <a:solidFill>
+            <a:srgbClr val="2C2C2E"/>
+          </a:solidFill>
+          <a:ln>
+            <a:noFill/>
+          </a:ln>
+          <a:effectLst/>
+        </p:spPr>
+        <p:style>
+          <a:lnRef idx="1">
+            <a:schemeClr val="accent1"/>
+          </a:lnRef>
+          <a:fillRef idx="3">
+            <a:schemeClr val="accent1"/>
+          </a:fillRef>
+          <a:effectRef idx="2">
+            <a:schemeClr val="accent1"/>
+          </a:effectRef>
+          <a:fontRef idx="minor">
+            <a:schemeClr val="lt1"/>
+          </a:fontRef>
+        </p:style>
+        <p:txBody>
+          <a:bodyPr rtlCol="0" anchor="ctr"/>
+          <a:lstStyle/>
+          <a:p>
+            <a:pPr algn="ctr"/>
+          </a:p>
+        </p:txBody>
+      </p:sp>
+      <p:sp>
+        <p:nvSpPr>
+          <p:cNvPr id="15" name="TextBox 14"/>
+          <p:cNvSpPr txBox="1"/>
+          <p:nvPr/>
+        </p:nvSpPr>
+        <p:spPr>
+          <a:xfrm>
+            <a:off x="137160" y="1005840"/>
+            <a:ext cx="502920" cy="182880"/>
+          </a:xfrm>
+          <a:prstGeom prst="rect">
+            <a:avLst/>
+          </a:prstGeom>
+          <a:noFill/>
+        </p:spPr>
+        <p:txBody>
+          <a:bodyPr wrap="square" tIns="0" bIns="0" lIns="0" rIns="0">
+            <a:spAutoFit/>
+          </a:bodyPr>
+          <a:lstStyle/>
+          <a:p>
+            <a:pPr algn="r">
+              <a:defRPr sz="700" b="0">
+                <a:solidFill>
+                  <a:srgbClr val="6B6B6B"/>
+                </a:solidFill>
+                <a:latin typeface="Inter"/>
+              </a:defRPr>
+            </a:pPr>
+            <a:r>
+              <a:t>10</a:t>
+            </a:r>
+          </a:p>
+        </p:txBody>
+      </p:sp>
+      <p:sp>
+        <p:nvSpPr>
+          <p:cNvPr id="16" name="Rounded Rectangle 15"/>
+          <p:cNvSpPr/>
+          <p:nvPr/>
+        </p:nvSpPr>
+        <p:spPr>
+          <a:xfrm>
+            <a:off x="731520" y="1097280"/>
+            <a:ext cx="320040" cy="2834639"/>
+          </a:xfrm>
+          <a:prstGeom prst="roundRect">
+            <a:avLst/>
+          </a:prstGeom>
+          <a:solidFill>
+            <a:srgbClr val="5A5A5E"/>
+          </a:solidFill>
+          <a:ln>
+            <a:noFill/>
+          </a:ln>
+          <a:effectLst/>
+        </p:spPr>
+        <p:style>
+          <a:lnRef idx="1">
+            <a:schemeClr val="accent1"/>
+          </a:lnRef>
+          <a:fillRef idx="3">
+            <a:schemeClr val="accent1"/>
+          </a:fillRef>
+          <a:effectRef idx="2">
+            <a:schemeClr val="accent1"/>
+          </a:effectRef>
+          <a:fontRef idx="minor">
+            <a:schemeClr val="lt1"/>
+          </a:fontRef>
+        </p:style>
+        <p:txBody>
+          <a:bodyPr rtlCol="0" anchor="ctr"/>
+          <a:lstStyle/>
+          <a:p>
+            <a:pPr algn="ctr"/>
+          </a:p>
+        </p:txBody>
+      </p:sp>
+      <p:sp>
+        <p:nvSpPr>
+          <p:cNvPr id="17" name="Rounded Rectangle 16"/>
+          <p:cNvSpPr/>
+          <p:nvPr/>
+        </p:nvSpPr>
+        <p:spPr>
+          <a:xfrm>
+            <a:off x="1088136" y="1380744"/>
+            <a:ext cx="320040" cy="2551175"/>
+          </a:xfrm>
+          <a:prstGeom prst="roundRect">
+            <a:avLst/>
+          </a:prstGeom>
+          <a:solidFill>
+            <a:srgbClr val="0066FF"/>
+          </a:solidFill>
+          <a:ln>
+            <a:noFill/>
+          </a:ln>
+          <a:effectLst/>
+        </p:spPr>
+        <p:style>
+          <a:lnRef idx="1">
+            <a:schemeClr val="accent1"/>
+          </a:lnRef>
+          <a:fillRef idx="3">
+            <a:schemeClr val="accent1"/>
+          </a:fillRef>
+          <a:effectRef idx="2">
+            <a:schemeClr val="accent1"/>
+          </a:effectRef>
+          <a:fontRef idx="minor">
+            <a:schemeClr val="lt1"/>
+          </a:fontRef>
+        </p:style>
+        <p:txBody>
+          <a:bodyPr rtlCol="0" anchor="ctr"/>
+          <a:lstStyle/>
+          <a:p>
+            <a:pPr algn="ctr"/>
+          </a:p>
+        </p:txBody>
+      </p:sp>
+      <p:sp>
+        <p:nvSpPr>
+          <p:cNvPr id="18" name="TextBox 17"/>
+          <p:cNvSpPr txBox="1"/>
+          <p:nvPr/>
+        </p:nvSpPr>
+        <p:spPr>
+          <a:xfrm>
+            <a:off x="731520" y="896112"/>
+            <a:ext cx="320040" cy="182880"/>
+          </a:xfrm>
+          <a:prstGeom prst="rect">
+            <a:avLst/>
+          </a:prstGeom>
+          <a:noFill/>
+        </p:spPr>
+        <p:txBody>
+          <a:bodyPr wrap="square" tIns="0" bIns="0" lIns="0" rIns="0">
+            <a:spAutoFit/>
+          </a:bodyPr>
+          <a:lstStyle/>
+          <a:p>
+            <a:pPr algn="ctr">
+              <a:defRPr sz="700" b="1">
+                <a:solidFill>
+                  <a:srgbClr val="A0A0A0"/>
+                </a:solidFill>
+                <a:latin typeface="Inter"/>
+              </a:defRPr>
+            </a:pPr>
+            <a:r>
+              <a:t>10</a:t>
+            </a:r>
+          </a:p>
+        </p:txBody>
+      </p:sp>
+      <p:sp>
+        <p:nvSpPr>
+          <p:cNvPr id="19" name="TextBox 18"/>
+          <p:cNvSpPr txBox="1"/>
+          <p:nvPr/>
+        </p:nvSpPr>
+        <p:spPr>
+          <a:xfrm>
+            <a:off x="1088136" y="1179576"/>
+            <a:ext cx="320040" cy="182880"/>
+          </a:xfrm>
+          <a:prstGeom prst="rect">
+            <a:avLst/>
+          </a:prstGeom>
+          <a:noFill/>
+        </p:spPr>
+        <p:txBody>
+          <a:bodyPr wrap="square" tIns="0" bIns="0" lIns="0" rIns="0">
+            <a:spAutoFit/>
+          </a:bodyPr>
+          <a:lstStyle/>
+          <a:p>
+            <a:pPr algn="ctr">
+              <a:defRPr sz="700" b="1">
+                <a:solidFill>
+                  <a:srgbClr val="4A8AFF"/>
+                </a:solidFill>
+                <a:latin typeface="Inter"/>
+              </a:defRPr>
+            </a:pPr>
+            <a:r>
+              <a:t>9</a:t>
+            </a:r>
+          </a:p>
+        </p:txBody>
+      </p:sp>
+      <p:sp>
+        <p:nvSpPr>
+          <p:cNvPr id="20" name="TextBox 19"/>
+          <p:cNvSpPr txBox="1"/>
+          <p:nvPr/>
+        </p:nvSpPr>
+        <p:spPr>
+          <a:xfrm>
+            <a:off x="685800" y="4005072"/>
+            <a:ext cx="768096" cy="274320"/>
+          </a:xfrm>
+          <a:prstGeom prst="rect">
+            <a:avLst/>
+          </a:prstGeom>
+          <a:noFill/>
+        </p:spPr>
+        <p:txBody>
+          <a:bodyPr wrap="square" tIns="0" bIns="0" lIns="0" rIns="0">
+            <a:spAutoFit/>
+          </a:bodyPr>
+          <a:lstStyle/>
+          <a:p>
+            <a:pPr algn="ctr">
+              <a:defRPr sz="700" b="0">
+                <a:solidFill>
+                  <a:srgbClr val="A0A0A0"/>
+                </a:solidFill>
+                <a:latin typeface="Inter"/>
+              </a:defRPr>
+            </a:pPr>
+            <a:r>
+              <a:t>Product strategy</a:t>
+            </a:r>
+          </a:p>
+        </p:txBody>
+      </p:sp>
+      <p:sp>
+        <p:nvSpPr>
+          <p:cNvPr id="21" name="Rounded Rectangle 20"/>
+          <p:cNvSpPr/>
+          <p:nvPr/>
+        </p:nvSpPr>
+        <p:spPr>
+          <a:xfrm>
+            <a:off x="1700784" y="1097280"/>
+            <a:ext cx="320040" cy="2834639"/>
+          </a:xfrm>
+          <a:prstGeom prst="roundRect">
+            <a:avLst/>
+          </a:prstGeom>
+          <a:solidFill>
+            <a:srgbClr val="5A5A5E"/>
+          </a:solidFill>
+          <a:ln>
+            <a:noFill/>
+          </a:ln>
+          <a:effectLst/>
+        </p:spPr>
+        <p:style>
+          <a:lnRef idx="1">
+            <a:schemeClr val="accent1"/>
+          </a:lnRef>
+          <a:fillRef idx="3">
+            <a:schemeClr val="accent1"/>
+          </a:fillRef>
+          <a:effectRef idx="2">
+            <a:schemeClr val="accent1"/>
+          </a:effectRef>
+          <a:fontRef idx="minor">
+            <a:schemeClr val="lt1"/>
+          </a:fontRef>
+        </p:style>
+        <p:txBody>
+          <a:bodyPr rtlCol="0" anchor="ctr"/>
+          <a:lstStyle/>
+          <a:p>
+            <a:pPr algn="ctr"/>
+          </a:p>
+        </p:txBody>
+      </p:sp>
+      <p:sp>
+        <p:nvSpPr>
+          <p:cNvPr id="22" name="Rounded Rectangle 21"/>
+          <p:cNvSpPr/>
+          <p:nvPr/>
+        </p:nvSpPr>
+        <p:spPr>
+          <a:xfrm>
+            <a:off x="2057400" y="1380744"/>
+            <a:ext cx="320040" cy="2551175"/>
+          </a:xfrm>
+          <a:prstGeom prst="roundRect">
+            <a:avLst/>
+          </a:prstGeom>
+          <a:solidFill>
+            <a:srgbClr val="0066FF"/>
+          </a:solidFill>
+          <a:ln>
+            <a:noFill/>
+          </a:ln>
+          <a:effectLst/>
+        </p:spPr>
+        <p:style>
+          <a:lnRef idx="1">
+            <a:schemeClr val="accent1"/>
+          </a:lnRef>
+          <a:fillRef idx="3">
+            <a:schemeClr val="accent1"/>
+          </a:fillRef>
+          <a:effectRef idx="2">
+            <a:schemeClr val="accent1"/>
+          </a:effectRef>
+          <a:fontRef idx="minor">
+            <a:schemeClr val="lt1"/>
+          </a:fontRef>
+        </p:style>
+        <p:txBody>
+          <a:bodyPr rtlCol="0" anchor="ctr"/>
+          <a:lstStyle/>
+          <a:p>
+            <a:pPr algn="ctr"/>
+          </a:p>
+        </p:txBody>
+      </p:sp>
+      <p:sp>
+        <p:nvSpPr>
+          <p:cNvPr id="23" name="TextBox 22"/>
+          <p:cNvSpPr txBox="1"/>
+          <p:nvPr/>
+        </p:nvSpPr>
+        <p:spPr>
+          <a:xfrm>
+            <a:off x="1700784" y="896112"/>
+            <a:ext cx="320040" cy="182880"/>
+          </a:xfrm>
+          <a:prstGeom prst="rect">
+            <a:avLst/>
+          </a:prstGeom>
+          <a:noFill/>
+        </p:spPr>
+        <p:txBody>
+          <a:bodyPr wrap="square" tIns="0" bIns="0" lIns="0" rIns="0">
+            <a:spAutoFit/>
+          </a:bodyPr>
+          <a:lstStyle/>
+          <a:p>
+            <a:pPr algn="ctr">
+              <a:defRPr sz="700" b="1">
+                <a:solidFill>
+                  <a:srgbClr val="A0A0A0"/>
+                </a:solidFill>
+                <a:latin typeface="Inter"/>
+              </a:defRPr>
+            </a:pPr>
+            <a:r>
+              <a:t>10</a:t>
+            </a:r>
+          </a:p>
+        </p:txBody>
+      </p:sp>
+      <p:sp>
+        <p:nvSpPr>
+          <p:cNvPr id="24" name="TextBox 23"/>
+          <p:cNvSpPr txBox="1"/>
+          <p:nvPr/>
+        </p:nvSpPr>
+        <p:spPr>
+          <a:xfrm>
+            <a:off x="2057400" y="1179576"/>
+            <a:ext cx="320040" cy="182880"/>
+          </a:xfrm>
+          <a:prstGeom prst="rect">
+            <a:avLst/>
+          </a:prstGeom>
+          <a:noFill/>
+        </p:spPr>
+        <p:txBody>
+          <a:bodyPr wrap="square" tIns="0" bIns="0" lIns="0" rIns="0">
+            <a:spAutoFit/>
+          </a:bodyPr>
+          <a:lstStyle/>
+          <a:p>
+            <a:pPr algn="ctr">
+              <a:defRPr sz="700" b="1">
+                <a:solidFill>
+                  <a:srgbClr val="4A8AFF"/>
+                </a:solidFill>
+                <a:latin typeface="Inter"/>
+              </a:defRPr>
+            </a:pPr>
+            <a:r>
+              <a:t>9</a:t>
+            </a:r>
+          </a:p>
+        </p:txBody>
+      </p:sp>
+      <p:sp>
+        <p:nvSpPr>
+          <p:cNvPr id="25" name="TextBox 24"/>
+          <p:cNvSpPr txBox="1"/>
+          <p:nvPr/>
+        </p:nvSpPr>
+        <p:spPr>
+          <a:xfrm>
+            <a:off x="1655064" y="4005072"/>
+            <a:ext cx="768096" cy="274320"/>
+          </a:xfrm>
+          <a:prstGeom prst="rect">
+            <a:avLst/>
+          </a:prstGeom>
+          <a:noFill/>
+        </p:spPr>
+        <p:txBody>
+          <a:bodyPr wrap="square" tIns="0" bIns="0" lIns="0" rIns="0">
+            <a:spAutoFit/>
+          </a:bodyPr>
+          <a:lstStyle/>
+          <a:p>
+            <a:pPr algn="ctr">
+              <a:defRPr sz="700" b="0">
+                <a:solidFill>
+                  <a:srgbClr val="A0A0A0"/>
+                </a:solidFill>
+                <a:latin typeface="Inter"/>
+              </a:defRPr>
+            </a:pPr>
+            <a:r>
+              <a:t>Data &amp; insights</a:t>
+            </a:r>
+          </a:p>
+        </p:txBody>
+      </p:sp>
+      <p:sp>
+        <p:nvSpPr>
+          <p:cNvPr id="26" name="Rounded Rectangle 25"/>
+          <p:cNvSpPr/>
+          <p:nvPr/>
+        </p:nvSpPr>
+        <p:spPr>
+          <a:xfrm>
+            <a:off x="2670048" y="1097280"/>
+            <a:ext cx="320040" cy="2834639"/>
+          </a:xfrm>
+          <a:prstGeom prst="roundRect">
+            <a:avLst/>
+          </a:prstGeom>
+          <a:solidFill>
+            <a:srgbClr val="5A5A5E"/>
+          </a:solidFill>
+          <a:ln>
+            <a:noFill/>
+          </a:ln>
+          <a:effectLst/>
+        </p:spPr>
+        <p:style>
+          <a:lnRef idx="1">
+            <a:schemeClr val="accent1"/>
+          </a:lnRef>
+          <a:fillRef idx="3">
+            <a:schemeClr val="accent1"/>
+          </a:fillRef>
+          <a:effectRef idx="2">
+            <a:schemeClr val="accent1"/>
+          </a:effectRef>
+          <a:fontRef idx="minor">
+            <a:schemeClr val="lt1"/>
+          </a:fontRef>
+        </p:style>
+        <p:txBody>
+          <a:bodyPr rtlCol="0" anchor="ctr"/>
+          <a:lstStyle/>
+          <a:p>
+            <a:pPr algn="ctr"/>
+          </a:p>
+        </p:txBody>
+      </p:sp>
+      <p:sp>
+        <p:nvSpPr>
+          <p:cNvPr id="27" name="Rounded Rectangle 26"/>
+          <p:cNvSpPr/>
+          <p:nvPr/>
+        </p:nvSpPr>
+        <p:spPr>
+          <a:xfrm>
+            <a:off x="3026664" y="1097280"/>
+            <a:ext cx="320040" cy="2834639"/>
+          </a:xfrm>
+          <a:prstGeom prst="roundRect">
+            <a:avLst/>
+          </a:prstGeom>
+          <a:solidFill>
+            <a:srgbClr val="0066FF"/>
+          </a:solidFill>
+          <a:ln>
+            <a:noFill/>
+          </a:ln>
+          <a:effectLst/>
+        </p:spPr>
+        <p:style>
+          <a:lnRef idx="1">
+            <a:schemeClr val="accent1"/>
+          </a:lnRef>
+          <a:fillRef idx="3">
+            <a:schemeClr val="accent1"/>
+          </a:fillRef>
+          <a:effectRef idx="2">
+            <a:schemeClr val="accent1"/>
+          </a:effectRef>
+          <a:fontRef idx="minor">
+            <a:schemeClr val="lt1"/>
+          </a:fontRef>
+        </p:style>
+        <p:txBody>
+          <a:bodyPr rtlCol="0" anchor="ctr"/>
+          <a:lstStyle/>
+          <a:p>
+            <a:pPr algn="ctr"/>
+          </a:p>
+        </p:txBody>
+      </p:sp>
+      <p:sp>
+        <p:nvSpPr>
+          <p:cNvPr id="28" name="TextBox 27"/>
+          <p:cNvSpPr txBox="1"/>
+          <p:nvPr/>
+        </p:nvSpPr>
+        <p:spPr>
+          <a:xfrm>
+            <a:off x="2670048" y="896112"/>
+            <a:ext cx="320040" cy="182880"/>
+          </a:xfrm>
+          <a:prstGeom prst="rect">
+            <a:avLst/>
+          </a:prstGeom>
+          <a:noFill/>
+        </p:spPr>
+        <p:txBody>
+          <a:bodyPr wrap="square" tIns="0" bIns="0" lIns="0" rIns="0">
+            <a:spAutoFit/>
+          </a:bodyPr>
+          <a:lstStyle/>
+          <a:p>
+            <a:pPr algn="ctr">
+              <a:defRPr sz="700" b="1">
+                <a:solidFill>
+                  <a:srgbClr val="A0A0A0"/>
+                </a:solidFill>
+                <a:latin typeface="Inter"/>
+              </a:defRPr>
+            </a:pPr>
+            <a:r>
+              <a:t>10</a:t>
+            </a:r>
+          </a:p>
+        </p:txBody>
+      </p:sp>
+      <p:sp>
+        <p:nvSpPr>
+          <p:cNvPr id="29" name="TextBox 28"/>
+          <p:cNvSpPr txBox="1"/>
+          <p:nvPr/>
+        </p:nvSpPr>
+        <p:spPr>
+          <a:xfrm>
+            <a:off x="3026664" y="896112"/>
+            <a:ext cx="320040" cy="182880"/>
+          </a:xfrm>
+          <a:prstGeom prst="rect">
+            <a:avLst/>
+          </a:prstGeom>
+          <a:noFill/>
+        </p:spPr>
+        <p:txBody>
+          <a:bodyPr wrap="square" tIns="0" bIns="0" lIns="0" rIns="0">
+            <a:spAutoFit/>
+          </a:bodyPr>
+          <a:lstStyle/>
+          <a:p>
+            <a:pPr algn="ctr">
+              <a:defRPr sz="700" b="1">
+                <a:solidFill>
+                  <a:srgbClr val="4A8AFF"/>
+                </a:solidFill>
+                <a:latin typeface="Inter"/>
+              </a:defRPr>
+            </a:pPr>
+            <a:r>
+              <a:t>10</a:t>
+            </a:r>
+          </a:p>
+        </p:txBody>
+      </p:sp>
+      <p:sp>
+        <p:nvSpPr>
+          <p:cNvPr id="30" name="TextBox 29"/>
+          <p:cNvSpPr txBox="1"/>
+          <p:nvPr/>
+        </p:nvSpPr>
+        <p:spPr>
+          <a:xfrm>
+            <a:off x="2624328" y="4005072"/>
+            <a:ext cx="768096" cy="274320"/>
+          </a:xfrm>
+          <a:prstGeom prst="rect">
+            <a:avLst/>
+          </a:prstGeom>
+          <a:noFill/>
+        </p:spPr>
+        <p:txBody>
+          <a:bodyPr wrap="square" tIns="0" bIns="0" lIns="0" rIns="0">
+            <a:spAutoFit/>
+          </a:bodyPr>
+          <a:lstStyle/>
+          <a:p>
+            <a:pPr algn="ctr">
+              <a:defRPr sz="700" b="0">
+                <a:solidFill>
+                  <a:srgbClr val="A0A0A0"/>
+                </a:solidFill>
+                <a:latin typeface="Inter"/>
+              </a:defRPr>
+            </a:pPr>
+            <a:r>
+              <a:t>Cross-functional</a:t>
+            </a:r>
+          </a:p>
+        </p:txBody>
+      </p:sp>
+      <p:sp>
+        <p:nvSpPr>
+          <p:cNvPr id="31" name="Rounded Rectangle 30"/>
+          <p:cNvSpPr/>
+          <p:nvPr/>
+        </p:nvSpPr>
+        <p:spPr>
+          <a:xfrm>
+            <a:off x="3639312" y="1097280"/>
+            <a:ext cx="320040" cy="2834639"/>
+          </a:xfrm>
+          <a:prstGeom prst="roundRect">
+            <a:avLst/>
+          </a:prstGeom>
+          <a:solidFill>
+            <a:srgbClr val="5A5A5E"/>
+          </a:solidFill>
+          <a:ln>
+            <a:noFill/>
+          </a:ln>
+          <a:effectLst/>
+        </p:spPr>
+        <p:style>
+          <a:lnRef idx="1">
+            <a:schemeClr val="accent1"/>
+          </a:lnRef>
+          <a:fillRef idx="3">
+            <a:schemeClr val="accent1"/>
+          </a:fillRef>
+          <a:effectRef idx="2">
+            <a:schemeClr val="accent1"/>
+          </a:effectRef>
+          <a:fontRef idx="minor">
+            <a:schemeClr val="lt1"/>
+          </a:fontRef>
+        </p:style>
+        <p:txBody>
+          <a:bodyPr rtlCol="0" anchor="ctr"/>
+          <a:lstStyle/>
+          <a:p>
+            <a:pPr algn="ctr"/>
+          </a:p>
+        </p:txBody>
+      </p:sp>
+      <p:sp>
+        <p:nvSpPr>
+          <p:cNvPr id="32" name="Rounded Rectangle 31"/>
+          <p:cNvSpPr/>
+          <p:nvPr/>
+        </p:nvSpPr>
+        <p:spPr>
+          <a:xfrm>
+            <a:off x="3995928" y="1664207"/>
+            <a:ext cx="320040" cy="2267712"/>
+          </a:xfrm>
+          <a:prstGeom prst="roundRect">
+            <a:avLst/>
+          </a:prstGeom>
+          <a:solidFill>
+            <a:srgbClr val="0066FF"/>
+          </a:solidFill>
+          <a:ln>
+            <a:noFill/>
+          </a:ln>
+          <a:effectLst/>
+        </p:spPr>
+        <p:style>
+          <a:lnRef idx="1">
+            <a:schemeClr val="accent1"/>
+          </a:lnRef>
+          <a:fillRef idx="3">
+            <a:schemeClr val="accent1"/>
+          </a:fillRef>
+          <a:effectRef idx="2">
+            <a:schemeClr val="accent1"/>
+          </a:effectRef>
+          <a:fontRef idx="minor">
+            <a:schemeClr val="lt1"/>
+          </a:fontRef>
+        </p:style>
+        <p:txBody>
+          <a:bodyPr rtlCol="0" anchor="ctr"/>
+          <a:lstStyle/>
+          <a:p>
+            <a:pPr algn="ctr"/>
+          </a:p>
+        </p:txBody>
+      </p:sp>
+      <p:sp>
+        <p:nvSpPr>
+          <p:cNvPr id="33" name="TextBox 32"/>
+          <p:cNvSpPr txBox="1"/>
+          <p:nvPr/>
+        </p:nvSpPr>
+        <p:spPr>
+          <a:xfrm>
+            <a:off x="3639312" y="896112"/>
+            <a:ext cx="320040" cy="182880"/>
+          </a:xfrm>
+          <a:prstGeom prst="rect">
+            <a:avLst/>
+          </a:prstGeom>
+          <a:noFill/>
+        </p:spPr>
+        <p:txBody>
+          <a:bodyPr wrap="square" tIns="0" bIns="0" lIns="0" rIns="0">
+            <a:spAutoFit/>
+          </a:bodyPr>
+          <a:lstStyle/>
+          <a:p>
+            <a:pPr algn="ctr">
+              <a:defRPr sz="700" b="1">
+                <a:solidFill>
+                  <a:srgbClr val="A0A0A0"/>
+                </a:solidFill>
+                <a:latin typeface="Inter"/>
+              </a:defRPr>
+            </a:pPr>
+            <a:r>
+              <a:t>10</a:t>
+            </a:r>
+          </a:p>
+        </p:txBody>
+      </p:sp>
+      <p:sp>
+        <p:nvSpPr>
+          <p:cNvPr id="34" name="TextBox 33"/>
+          <p:cNvSpPr txBox="1"/>
+          <p:nvPr/>
+        </p:nvSpPr>
+        <p:spPr>
+          <a:xfrm>
+            <a:off x="3995928" y="1463039"/>
+            <a:ext cx="320040" cy="182880"/>
+          </a:xfrm>
+          <a:prstGeom prst="rect">
+            <a:avLst/>
+          </a:prstGeom>
+          <a:noFill/>
+        </p:spPr>
+        <p:txBody>
+          <a:bodyPr wrap="square" tIns="0" bIns="0" lIns="0" rIns="0">
+            <a:spAutoFit/>
+          </a:bodyPr>
+          <a:lstStyle/>
+          <a:p>
+            <a:pPr algn="ctr">
+              <a:defRPr sz="700" b="1">
+                <a:solidFill>
+                  <a:srgbClr val="4A8AFF"/>
+                </a:solidFill>
+                <a:latin typeface="Inter"/>
+              </a:defRPr>
+            </a:pPr>
+            <a:r>
+              <a:t>8</a:t>
+            </a:r>
+          </a:p>
+        </p:txBody>
+      </p:sp>
+      <p:sp>
+        <p:nvSpPr>
+          <p:cNvPr id="35" name="TextBox 34"/>
+          <p:cNvSpPr txBox="1"/>
+          <p:nvPr/>
+        </p:nvSpPr>
+        <p:spPr>
+          <a:xfrm>
+            <a:off x="3593592" y="4005072"/>
+            <a:ext cx="768096" cy="274320"/>
+          </a:xfrm>
+          <a:prstGeom prst="rect">
+            <a:avLst/>
+          </a:prstGeom>
+          <a:noFill/>
+        </p:spPr>
+        <p:txBody>
+          <a:bodyPr wrap="square" tIns="0" bIns="0" lIns="0" rIns="0">
+            <a:spAutoFit/>
+          </a:bodyPr>
+          <a:lstStyle/>
+          <a:p>
+            <a:pPr algn="ctr">
+              <a:defRPr sz="700" b="0">
+                <a:solidFill>
+                  <a:srgbClr val="A0A0A0"/>
+                </a:solidFill>
+                <a:latin typeface="Inter"/>
+              </a:defRPr>
+            </a:pPr>
+            <a:r>
+              <a:t>User testing</a:t>
+            </a:r>
+          </a:p>
+        </p:txBody>
+      </p:sp>
+      <p:sp>
+        <p:nvSpPr>
+          <p:cNvPr id="36" name="Rounded Rectangle 35"/>
+          <p:cNvSpPr/>
+          <p:nvPr/>
+        </p:nvSpPr>
+        <p:spPr>
+          <a:xfrm>
+            <a:off x="4608576" y="1097280"/>
+            <a:ext cx="320040" cy="2834639"/>
+          </a:xfrm>
+          <a:prstGeom prst="roundRect">
+            <a:avLst/>
+          </a:prstGeom>
+          <a:solidFill>
+            <a:srgbClr val="5A5A5E"/>
+          </a:solidFill>
+          <a:ln>
+            <a:noFill/>
+          </a:ln>
+          <a:effectLst/>
+        </p:spPr>
+        <p:style>
+          <a:lnRef idx="1">
+            <a:schemeClr val="accent1"/>
+          </a:lnRef>
+          <a:fillRef idx="3">
+            <a:schemeClr val="accent1"/>
+          </a:fillRef>
+          <a:effectRef idx="2">
+            <a:schemeClr val="accent1"/>
+          </a:effectRef>
+          <a:fontRef idx="minor">
+            <a:schemeClr val="lt1"/>
+          </a:fontRef>
+        </p:style>
+        <p:txBody>
+          <a:bodyPr rtlCol="0" anchor="ctr"/>
+          <a:lstStyle/>
+          <a:p>
+            <a:pPr algn="ctr"/>
+          </a:p>
+        </p:txBody>
+      </p:sp>
+      <p:sp>
+        <p:nvSpPr>
+          <p:cNvPr id="37" name="Rounded Rectangle 36"/>
+          <p:cNvSpPr/>
+          <p:nvPr/>
+        </p:nvSpPr>
+        <p:spPr>
+          <a:xfrm>
+            <a:off x="4965192" y="1380744"/>
+            <a:ext cx="320040" cy="2551175"/>
+          </a:xfrm>
+          <a:prstGeom prst="roundRect">
+            <a:avLst/>
+          </a:prstGeom>
+          <a:solidFill>
+            <a:srgbClr val="0066FF"/>
+          </a:solidFill>
+          <a:ln>
+            <a:noFill/>
+          </a:ln>
+          <a:effectLst/>
+        </p:spPr>
+        <p:style>
+          <a:lnRef idx="1">
+            <a:schemeClr val="accent1"/>
+          </a:lnRef>
+          <a:fillRef idx="3">
+            <a:schemeClr val="accent1"/>
+          </a:fillRef>
+          <a:effectRef idx="2">
+            <a:schemeClr val="accent1"/>
+          </a:effectRef>
+          <a:fontRef idx="minor">
+            <a:schemeClr val="lt1"/>
+          </a:fontRef>
+        </p:style>
+        <p:txBody>
+          <a:bodyPr rtlCol="0" anchor="ctr"/>
+          <a:lstStyle/>
+          <a:p>
+            <a:pPr algn="ctr"/>
+          </a:p>
+        </p:txBody>
+      </p:sp>
+      <p:sp>
+        <p:nvSpPr>
+          <p:cNvPr id="38" name="TextBox 37"/>
+          <p:cNvSpPr txBox="1"/>
+          <p:nvPr/>
+        </p:nvSpPr>
+        <p:spPr>
+          <a:xfrm>
+            <a:off x="4608576" y="896112"/>
+            <a:ext cx="320040" cy="182880"/>
+          </a:xfrm>
+          <a:prstGeom prst="rect">
+            <a:avLst/>
+          </a:prstGeom>
+          <a:noFill/>
+        </p:spPr>
+        <p:txBody>
+          <a:bodyPr wrap="square" tIns="0" bIns="0" lIns="0" rIns="0">
+            <a:spAutoFit/>
+          </a:bodyPr>
+          <a:lstStyle/>
+          <a:p>
+            <a:pPr algn="ctr">
+              <a:defRPr sz="700" b="1">
+                <a:solidFill>
+                  <a:srgbClr val="A0A0A0"/>
+                </a:solidFill>
+                <a:latin typeface="Inter"/>
+              </a:defRPr>
+            </a:pPr>
+            <a:r>
+              <a:t>10</a:t>
+            </a:r>
+          </a:p>
+        </p:txBody>
+      </p:sp>
+      <p:sp>
+        <p:nvSpPr>
+          <p:cNvPr id="39" name="TextBox 38"/>
+          <p:cNvSpPr txBox="1"/>
+          <p:nvPr/>
+        </p:nvSpPr>
+        <p:spPr>
+          <a:xfrm>
+            <a:off x="4965192" y="1179576"/>
+            <a:ext cx="320040" cy="182880"/>
+          </a:xfrm>
+          <a:prstGeom prst="rect">
+            <a:avLst/>
+          </a:prstGeom>
+          <a:noFill/>
+        </p:spPr>
+        <p:txBody>
+          <a:bodyPr wrap="square" tIns="0" bIns="0" lIns="0" rIns="0">
+            <a:spAutoFit/>
+          </a:bodyPr>
+          <a:lstStyle/>
+          <a:p>
+            <a:pPr algn="ctr">
+              <a:defRPr sz="700" b="1">
+                <a:solidFill>
+                  <a:srgbClr val="4A8AFF"/>
+                </a:solidFill>
+                <a:latin typeface="Inter"/>
+              </a:defRPr>
+            </a:pPr>
+            <a:r>
+              <a:t>9</a:t>
+            </a:r>
+          </a:p>
+        </p:txBody>
+      </p:sp>
+      <p:sp>
+        <p:nvSpPr>
+          <p:cNvPr id="40" name="TextBox 39"/>
+          <p:cNvSpPr txBox="1"/>
+          <p:nvPr/>
+        </p:nvSpPr>
+        <p:spPr>
+          <a:xfrm>
+            <a:off x="4562856" y="4005072"/>
+            <a:ext cx="768096" cy="274320"/>
+          </a:xfrm>
+          <a:prstGeom prst="rect">
+            <a:avLst/>
+          </a:prstGeom>
+          <a:noFill/>
+        </p:spPr>
+        <p:txBody>
+          <a:bodyPr wrap="square" tIns="0" bIns="0" lIns="0" rIns="0">
+            <a:spAutoFit/>
+          </a:bodyPr>
+          <a:lstStyle/>
+          <a:p>
+            <a:pPr algn="ctr">
+              <a:defRPr sz="700" b="0">
+                <a:solidFill>
+                  <a:srgbClr val="A0A0A0"/>
+                </a:solidFill>
+                <a:latin typeface="Inter"/>
+              </a:defRPr>
+            </a:pPr>
+            <a:r>
+              <a:t>Communication</a:t>
+            </a:r>
+          </a:p>
+        </p:txBody>
+      </p:sp>
+      <p:sp>
+        <p:nvSpPr>
+          <p:cNvPr id="41" name="Rounded Rectangle 40"/>
+          <p:cNvSpPr/>
+          <p:nvPr/>
+        </p:nvSpPr>
+        <p:spPr>
+          <a:xfrm>
+            <a:off x="5577840" y="2514600"/>
+            <a:ext cx="320040" cy="1417319"/>
+          </a:xfrm>
+          <a:prstGeom prst="roundRect">
+            <a:avLst/>
+          </a:prstGeom>
+          <a:solidFill>
+            <a:srgbClr val="5A5A5E"/>
+          </a:solidFill>
+          <a:ln>
+            <a:noFill/>
+          </a:ln>
+          <a:effectLst/>
+        </p:spPr>
+        <p:style>
+          <a:lnRef idx="1">
+            <a:schemeClr val="accent1"/>
+          </a:lnRef>
+          <a:fillRef idx="3">
+            <a:schemeClr val="accent1"/>
+          </a:fillRef>
+          <a:effectRef idx="2">
+            <a:schemeClr val="accent1"/>
+          </a:effectRef>
+          <a:fontRef idx="minor">
+            <a:schemeClr val="lt1"/>
+          </a:fontRef>
+        </p:style>
+        <p:txBody>
+          <a:bodyPr rtlCol="0" anchor="ctr"/>
+          <a:lstStyle/>
+          <a:p>
+            <a:pPr algn="ctr"/>
+          </a:p>
+        </p:txBody>
+      </p:sp>
+      <p:sp>
+        <p:nvSpPr>
+          <p:cNvPr id="42" name="Rounded Rectangle 41"/>
+          <p:cNvSpPr/>
+          <p:nvPr/>
+        </p:nvSpPr>
+        <p:spPr>
+          <a:xfrm>
+            <a:off x="5934456" y="1097280"/>
+            <a:ext cx="320040" cy="2834639"/>
+          </a:xfrm>
+          <a:prstGeom prst="roundRect">
+            <a:avLst/>
+          </a:prstGeom>
+          <a:solidFill>
+            <a:srgbClr val="0066FF"/>
+          </a:solidFill>
+          <a:ln>
+            <a:noFill/>
+          </a:ln>
+          <a:effectLst/>
+        </p:spPr>
+        <p:style>
+          <a:lnRef idx="1">
+            <a:schemeClr val="accent1"/>
+          </a:lnRef>
+          <a:fillRef idx="3">
+            <a:schemeClr val="accent1"/>
+          </a:fillRef>
+          <a:effectRef idx="2">
+            <a:schemeClr val="accent1"/>
+          </a:effectRef>
+          <a:fontRef idx="minor">
+            <a:schemeClr val="lt1"/>
+          </a:fontRef>
+        </p:style>
+        <p:txBody>
+          <a:bodyPr rtlCol="0" anchor="ctr"/>
+          <a:lstStyle/>
+          <a:p>
+            <a:pPr algn="ctr"/>
+          </a:p>
+        </p:txBody>
+      </p:sp>
+      <p:sp>
+        <p:nvSpPr>
+          <p:cNvPr id="43" name="TextBox 42"/>
+          <p:cNvSpPr txBox="1"/>
+          <p:nvPr/>
+        </p:nvSpPr>
+        <p:spPr>
+          <a:xfrm>
+            <a:off x="5577840" y="2313432"/>
+            <a:ext cx="320040" cy="182880"/>
+          </a:xfrm>
+          <a:prstGeom prst="rect">
+            <a:avLst/>
+          </a:prstGeom>
+          <a:noFill/>
+        </p:spPr>
+        <p:txBody>
+          <a:bodyPr wrap="square" tIns="0" bIns="0" lIns="0" rIns="0">
+            <a:spAutoFit/>
+          </a:bodyPr>
+          <a:lstStyle/>
+          <a:p>
+            <a:pPr algn="ctr">
+              <a:defRPr sz="700" b="1">
+                <a:solidFill>
+                  <a:srgbClr val="A0A0A0"/>
+                </a:solidFill>
+                <a:latin typeface="Inter"/>
+              </a:defRPr>
+            </a:pPr>
+            <a:r>
+              <a:t>5</a:t>
+            </a:r>
+          </a:p>
+        </p:txBody>
+      </p:sp>
+      <p:sp>
+        <p:nvSpPr>
+          <p:cNvPr id="44" name="TextBox 43"/>
+          <p:cNvSpPr txBox="1"/>
+          <p:nvPr/>
+        </p:nvSpPr>
+        <p:spPr>
+          <a:xfrm>
+            <a:off x="5934456" y="896112"/>
+            <a:ext cx="320040" cy="182880"/>
+          </a:xfrm>
+          <a:prstGeom prst="rect">
+            <a:avLst/>
+          </a:prstGeom>
+          <a:noFill/>
+        </p:spPr>
+        <p:txBody>
+          <a:bodyPr wrap="square" tIns="0" bIns="0" lIns="0" rIns="0">
+            <a:spAutoFit/>
+          </a:bodyPr>
+          <a:lstStyle/>
+          <a:p>
+            <a:pPr algn="ctr">
+              <a:defRPr sz="700" b="1">
+                <a:solidFill>
+                  <a:srgbClr val="4A8AFF"/>
+                </a:solidFill>
+                <a:latin typeface="Inter"/>
+              </a:defRPr>
+            </a:pPr>
+            <a:r>
+              <a:t>10</a:t>
+            </a:r>
+          </a:p>
+        </p:txBody>
+      </p:sp>
+      <p:sp>
+        <p:nvSpPr>
+          <p:cNvPr id="45" name="TextBox 44"/>
+          <p:cNvSpPr txBox="1"/>
+          <p:nvPr/>
+        </p:nvSpPr>
+        <p:spPr>
+          <a:xfrm>
+            <a:off x="5532120" y="4005072"/>
+            <a:ext cx="768096" cy="274320"/>
+          </a:xfrm>
+          <a:prstGeom prst="rect">
+            <a:avLst/>
+          </a:prstGeom>
+          <a:noFill/>
+        </p:spPr>
+        <p:txBody>
+          <a:bodyPr wrap="square" tIns="0" bIns="0" lIns="0" rIns="0">
+            <a:spAutoFit/>
+          </a:bodyPr>
+          <a:lstStyle/>
+          <a:p>
+            <a:pPr algn="ctr">
+              <a:defRPr sz="700" b="0">
+                <a:solidFill>
+                  <a:srgbClr val="A0A0A0"/>
+                </a:solidFill>
+                <a:latin typeface="Inter"/>
+              </a:defRPr>
+            </a:pPr>
+            <a:r>
+              <a:t>Startup mindset</a:t>
+            </a:r>
+          </a:p>
+        </p:txBody>
+      </p:sp>
+      <p:sp>
+        <p:nvSpPr>
+          <p:cNvPr id="46" name="Rounded Rectangle 45"/>
+          <p:cNvSpPr/>
+          <p:nvPr/>
+        </p:nvSpPr>
+        <p:spPr>
+          <a:xfrm>
+            <a:off x="731520" y="4434840"/>
+            <a:ext cx="164592" cy="118872"/>
+          </a:xfrm>
+          <a:prstGeom prst="roundRect">
+            <a:avLst/>
+          </a:prstGeom>
+          <a:solidFill>
+            <a:srgbClr val="5A5A5E"/>
+          </a:solidFill>
+          <a:ln>
+            <a:noFill/>
+          </a:ln>
+          <a:effectLst/>
+        </p:spPr>
+        <p:style>
+          <a:lnRef idx="1">
+            <a:schemeClr val="accent1"/>
+          </a:lnRef>
+          <a:fillRef idx="3">
+            <a:schemeClr val="accent1"/>
+          </a:fillRef>
+          <a:effectRef idx="2">
+            <a:schemeClr val="accent1"/>
+          </a:effectRef>
+          <a:fontRef idx="minor">
+            <a:schemeClr val="lt1"/>
+          </a:fontRef>
+        </p:style>
+        <p:txBody>
+          <a:bodyPr rtlCol="0" anchor="ctr"/>
+          <a:lstStyle/>
+          <a:p>
+            <a:pPr algn="ctr"/>
+          </a:p>
+        </p:txBody>
+      </p:sp>
+      <p:sp>
+        <p:nvSpPr>
+          <p:cNvPr id="47" name="TextBox 46"/>
+          <p:cNvSpPr txBox="1"/>
+          <p:nvPr/>
+        </p:nvSpPr>
+        <p:spPr>
+          <a:xfrm>
+            <a:off x="960120" y="4416552"/>
+            <a:ext cx="1371600" cy="182880"/>
+          </a:xfrm>
+          <a:prstGeom prst="rect">
+            <a:avLst/>
+          </a:prstGeom>
+          <a:noFill/>
+        </p:spPr>
+        <p:txBody>
+          <a:bodyPr wrap="square" tIns="0" bIns="0" lIns="0" rIns="0">
+            <a:spAutoFit/>
+          </a:bodyPr>
+          <a:lstStyle/>
+          <a:p>
+            <a:pPr algn="l">
+              <a:defRPr sz="700" b="0">
+                <a:solidFill>
+                  <a:srgbClr val="A0A0A0"/>
+                </a:solidFill>
+                <a:latin typeface="Inter"/>
+              </a:defRPr>
+            </a:pPr>
+            <a:r>
+              <a:t>JD Requirement (/10)</a:t>
+            </a:r>
+          </a:p>
+        </p:txBody>
+      </p:sp>
+      <p:sp>
+        <p:nvSpPr>
+          <p:cNvPr id="48" name="Rounded Rectangle 47"/>
+          <p:cNvSpPr/>
+          <p:nvPr/>
+        </p:nvSpPr>
+        <p:spPr>
+          <a:xfrm>
+            <a:off x="2743200" y="4434840"/>
+            <a:ext cx="164592" cy="118872"/>
+          </a:xfrm>
+          <a:prstGeom prst="roundRect">
+            <a:avLst/>
+          </a:prstGeom>
+          <a:solidFill>
+            <a:srgbClr val="0066FF"/>
+          </a:solidFill>
+          <a:ln>
+            <a:noFill/>
+          </a:ln>
+          <a:effectLst/>
+        </p:spPr>
+        <p:style>
+          <a:lnRef idx="1">
+            <a:schemeClr val="accent1"/>
+          </a:lnRef>
+          <a:fillRef idx="3">
+            <a:schemeClr val="accent1"/>
+          </a:fillRef>
+          <a:effectRef idx="2">
+            <a:schemeClr val="accent1"/>
+          </a:effectRef>
+          <a:fontRef idx="minor">
+            <a:schemeClr val="lt1"/>
+          </a:fontRef>
+        </p:style>
+        <p:txBody>
+          <a:bodyPr rtlCol="0" anchor="ctr"/>
+          <a:lstStyle/>
+          <a:p>
+            <a:pPr algn="ctr"/>
+          </a:p>
+        </p:txBody>
+      </p:sp>
+      <p:sp>
+        <p:nvSpPr>
+          <p:cNvPr id="49" name="TextBox 48"/>
+          <p:cNvSpPr txBox="1"/>
+          <p:nvPr/>
+        </p:nvSpPr>
+        <p:spPr>
+          <a:xfrm>
+            <a:off x="2971800" y="4416552"/>
+            <a:ext cx="1371600" cy="182880"/>
+          </a:xfrm>
+          <a:prstGeom prst="rect">
+            <a:avLst/>
+          </a:prstGeom>
+          <a:noFill/>
+        </p:spPr>
+        <p:txBody>
+          <a:bodyPr wrap="square" tIns="0" bIns="0" lIns="0" rIns="0">
+            <a:spAutoFit/>
+          </a:bodyPr>
+          <a:lstStyle/>
+          <a:p>
+            <a:pPr algn="l">
+              <a:defRPr sz="700" b="0">
+                <a:solidFill>
+                  <a:srgbClr val="A0A0A0"/>
+                </a:solidFill>
+                <a:latin typeface="Inter"/>
+              </a:defRPr>
+            </a:pPr>
+            <a:r>
+              <a:t>Shruti Evidence (/10)</a:t>
+            </a:r>
+          </a:p>
+        </p:txBody>
+      </p:sp>
+      <p:sp>
+        <p:nvSpPr>
+          <p:cNvPr id="50" name="TextBox 49"/>
+          <p:cNvSpPr txBox="1"/>
+          <p:nvPr/>
+        </p:nvSpPr>
+        <p:spPr>
+          <a:xfrm>
+            <a:off x="6583680" y="1280160"/>
+            <a:ext cx="2286000" cy="274320"/>
           </a:xfrm>
           <a:prstGeom prst="rect">
             <a:avLst/>
@@ -4483,14 +6018,14 @@
       </p:sp>
       <p:sp>
         <p:nvSpPr>
-          <p:cNvPr id="6" name="TextBox 5"/>
-          <p:cNvSpPr txBox="1"/>
-          <p:nvPr/>
-        </p:nvSpPr>
-        <p:spPr>
-          <a:xfrm>
-            <a:off x="5943600" y="1463040"/>
-            <a:ext cx="2926080" cy="2743200"/>
+          <p:cNvPr id="51" name="TextBox 50"/>
+          <p:cNvSpPr txBox="1"/>
+          <p:nvPr/>
+        </p:nvSpPr>
+        <p:spPr>
+          <a:xfrm>
+            <a:off x="6583680" y="1645920"/>
+            <a:ext cx="2286000" cy="1828800"/>
           </a:xfrm>
           <a:prstGeom prst="rect">
             <a:avLst/>
@@ -4515,7 +6050,7 @@
               </a:defRPr>
             </a:pPr>
             <a:r>
-              <a:t>•  Strong match on every JD requirement</a:t>
+              <a:t>•  Strong match on every core requirement</a:t>
             </a:r>
           </a:p>
           <a:p>
@@ -4531,7 +6066,7 @@
               </a:defRPr>
             </a:pPr>
             <a:r>
-              <a:t>•  Exceeds on startup/entrepreneurial (nice-to-have is core strength)</a:t>
+              <a:t>•  Exceeds on startup/entrepreneurial</a:t>
             </a:r>
           </a:p>
           <a:p>
@@ -4547,7 +6082,7 @@
               </a:defRPr>
             </a:pPr>
             <a:r>
-              <a:t>•  Weakest area (user testing) still backed by Elixr A/B testing + iwoca iterations</a:t>
+              <a:t>•  Weakest: user testing (still 8/10)</a:t>
             </a:r>
           </a:p>
         </p:txBody>

--- a/samples/Shruti_Revolut_WhyHireMe_Portfolio.pptx
+++ b/samples/Shruti_Revolut_WhyHireMe_Portfolio.pptx
@@ -4173,7 +4173,7 @@
         <p:spPr>
           <a:xfrm>
             <a:off x="731520" y="3931920"/>
-            <a:ext cx="5522975" cy="2743"/>
+            <a:ext cx="5486400" cy="2743"/>
           </a:xfrm>
           <a:prstGeom prst="rect">
             <a:avLst/>
@@ -4253,7 +4253,7 @@
         <p:spPr>
           <a:xfrm>
             <a:off x="731520" y="3364991"/>
-            <a:ext cx="5522975" cy="2743"/>
+            <a:ext cx="5486400" cy="2743"/>
           </a:xfrm>
           <a:prstGeom prst="rect">
             <a:avLst/>
@@ -4333,7 +4333,7 @@
         <p:spPr>
           <a:xfrm>
             <a:off x="731520" y="2798063"/>
-            <a:ext cx="5522975" cy="2743"/>
+            <a:ext cx="5486400" cy="2743"/>
           </a:xfrm>
           <a:prstGeom prst="rect">
             <a:avLst/>
@@ -4413,7 +4413,7 @@
         <p:spPr>
           <a:xfrm>
             <a:off x="731520" y="2231136"/>
-            <a:ext cx="5522975" cy="2743"/>
+            <a:ext cx="5486400" cy="2743"/>
           </a:xfrm>
           <a:prstGeom prst="rect">
             <a:avLst/>
@@ -4493,7 +4493,7 @@
         <p:spPr>
           <a:xfrm>
             <a:off x="731520" y="1664207"/>
-            <a:ext cx="5522975" cy="2743"/>
+            <a:ext cx="5486400" cy="2743"/>
           </a:xfrm>
           <a:prstGeom prst="rect">
             <a:avLst/>
@@ -4573,7 +4573,7 @@
         <p:spPr>
           <a:xfrm>
             <a:off x="731520" y="1097280"/>
-            <a:ext cx="5522975" cy="2743"/>
+            <a:ext cx="5486400" cy="2743"/>
           </a:xfrm>
           <a:prstGeom prst="rect">
             <a:avLst/>
@@ -4653,7 +4653,7 @@
         <p:spPr>
           <a:xfrm>
             <a:off x="731520" y="1097280"/>
-            <a:ext cx="320040" cy="2834639"/>
+            <a:ext cx="351129" cy="2834639"/>
           </a:xfrm>
           <a:prstGeom prst="roundRect">
             <a:avLst/>
@@ -4696,8 +4696,8 @@
         </p:nvSpPr>
         <p:spPr>
           <a:xfrm>
-            <a:off x="1088136" y="1380744"/>
-            <a:ext cx="320040" cy="2551175"/>
+            <a:off x="1119225" y="1380744"/>
+            <a:ext cx="351129" cy="2551175"/>
           </a:xfrm>
           <a:prstGeom prst="roundRect">
             <a:avLst/>
@@ -4741,7 +4741,7 @@
         <p:spPr>
           <a:xfrm>
             <a:off x="731520" y="896112"/>
-            <a:ext cx="320040" cy="182880"/>
+            <a:ext cx="351129" cy="182880"/>
           </a:xfrm>
           <a:prstGeom prst="rect">
             <a:avLst/>
@@ -4776,8 +4776,8 @@
         </p:nvSpPr>
         <p:spPr>
           <a:xfrm>
-            <a:off x="1088136" y="1179576"/>
-            <a:ext cx="320040" cy="182880"/>
+            <a:off x="1119225" y="1179576"/>
+            <a:ext cx="351129" cy="182880"/>
           </a:xfrm>
           <a:prstGeom prst="rect">
             <a:avLst/>
@@ -4813,7 +4813,7 @@
         <p:spPr>
           <a:xfrm>
             <a:off x="685800" y="4005072"/>
-            <a:ext cx="768096" cy="274320"/>
+            <a:ext cx="830275" cy="274320"/>
           </a:xfrm>
           <a:prstGeom prst="rect">
             <a:avLst/>
@@ -4848,8 +4848,8 @@
         </p:nvSpPr>
         <p:spPr>
           <a:xfrm>
-            <a:off x="1700784" y="1097280"/>
-            <a:ext cx="320040" cy="2834639"/>
+            <a:off x="1681032" y="1097280"/>
+            <a:ext cx="351129" cy="2834639"/>
           </a:xfrm>
           <a:prstGeom prst="roundRect">
             <a:avLst/>
@@ -4892,8 +4892,8 @@
         </p:nvSpPr>
         <p:spPr>
           <a:xfrm>
-            <a:off x="2057400" y="1380744"/>
-            <a:ext cx="320040" cy="2551175"/>
+            <a:off x="2068738" y="1380744"/>
+            <a:ext cx="351129" cy="2551175"/>
           </a:xfrm>
           <a:prstGeom prst="roundRect">
             <a:avLst/>
@@ -4936,8 +4936,8 @@
         </p:nvSpPr>
         <p:spPr>
           <a:xfrm>
-            <a:off x="1700784" y="896112"/>
-            <a:ext cx="320040" cy="182880"/>
+            <a:off x="1681032" y="896112"/>
+            <a:ext cx="351129" cy="182880"/>
           </a:xfrm>
           <a:prstGeom prst="rect">
             <a:avLst/>
@@ -4972,8 +4972,8 @@
         </p:nvSpPr>
         <p:spPr>
           <a:xfrm>
-            <a:off x="2057400" y="1179576"/>
-            <a:ext cx="320040" cy="182880"/>
+            <a:off x="2068738" y="1179576"/>
+            <a:ext cx="351129" cy="182880"/>
           </a:xfrm>
           <a:prstGeom prst="rect">
             <a:avLst/>
@@ -5008,8 +5008,8 @@
         </p:nvSpPr>
         <p:spPr>
           <a:xfrm>
-            <a:off x="1655064" y="4005072"/>
-            <a:ext cx="768096" cy="274320"/>
+            <a:off x="1635312" y="4005072"/>
+            <a:ext cx="830275" cy="274320"/>
           </a:xfrm>
           <a:prstGeom prst="rect">
             <a:avLst/>
@@ -5044,8 +5044,8 @@
         </p:nvSpPr>
         <p:spPr>
           <a:xfrm>
-            <a:off x="2670048" y="1097280"/>
-            <a:ext cx="320040" cy="2834639"/>
+            <a:off x="2630545" y="1097280"/>
+            <a:ext cx="351129" cy="2834639"/>
           </a:xfrm>
           <a:prstGeom prst="roundRect">
             <a:avLst/>
@@ -5088,8 +5088,8 @@
         </p:nvSpPr>
         <p:spPr>
           <a:xfrm>
-            <a:off x="3026664" y="1097280"/>
-            <a:ext cx="320040" cy="2834639"/>
+            <a:off x="3018251" y="1097280"/>
+            <a:ext cx="351129" cy="2834639"/>
           </a:xfrm>
           <a:prstGeom prst="roundRect">
             <a:avLst/>
@@ -5132,8 +5132,8 @@
         </p:nvSpPr>
         <p:spPr>
           <a:xfrm>
-            <a:off x="2670048" y="896112"/>
-            <a:ext cx="320040" cy="182880"/>
+            <a:off x="2630545" y="896112"/>
+            <a:ext cx="351129" cy="182880"/>
           </a:xfrm>
           <a:prstGeom prst="rect">
             <a:avLst/>
@@ -5168,8 +5168,8 @@
         </p:nvSpPr>
         <p:spPr>
           <a:xfrm>
-            <a:off x="3026664" y="896112"/>
-            <a:ext cx="320040" cy="182880"/>
+            <a:off x="3018251" y="896112"/>
+            <a:ext cx="351129" cy="182880"/>
           </a:xfrm>
           <a:prstGeom prst="rect">
             <a:avLst/>
@@ -5204,8 +5204,8 @@
         </p:nvSpPr>
         <p:spPr>
           <a:xfrm>
-            <a:off x="2624328" y="4005072"/>
-            <a:ext cx="768096" cy="274320"/>
+            <a:off x="2584825" y="4005072"/>
+            <a:ext cx="830275" cy="274320"/>
           </a:xfrm>
           <a:prstGeom prst="rect">
             <a:avLst/>
@@ -5240,8 +5240,8 @@
         </p:nvSpPr>
         <p:spPr>
           <a:xfrm>
-            <a:off x="3639312" y="1097280"/>
-            <a:ext cx="320040" cy="2834639"/>
+            <a:off x="3580058" y="1097280"/>
+            <a:ext cx="351129" cy="2834639"/>
           </a:xfrm>
           <a:prstGeom prst="roundRect">
             <a:avLst/>
@@ -5284,8 +5284,8 @@
         </p:nvSpPr>
         <p:spPr>
           <a:xfrm>
-            <a:off x="3995928" y="1664207"/>
-            <a:ext cx="320040" cy="2267712"/>
+            <a:off x="3967764" y="1664207"/>
+            <a:ext cx="351129" cy="2267712"/>
           </a:xfrm>
           <a:prstGeom prst="roundRect">
             <a:avLst/>
@@ -5328,8 +5328,8 @@
         </p:nvSpPr>
         <p:spPr>
           <a:xfrm>
-            <a:off x="3639312" y="896112"/>
-            <a:ext cx="320040" cy="182880"/>
+            <a:off x="3580058" y="896112"/>
+            <a:ext cx="351129" cy="182880"/>
           </a:xfrm>
           <a:prstGeom prst="rect">
             <a:avLst/>
@@ -5364,8 +5364,8 @@
         </p:nvSpPr>
         <p:spPr>
           <a:xfrm>
-            <a:off x="3995928" y="1463039"/>
-            <a:ext cx="320040" cy="182880"/>
+            <a:off x="3967764" y="1463039"/>
+            <a:ext cx="351129" cy="182880"/>
           </a:xfrm>
           <a:prstGeom prst="rect">
             <a:avLst/>
@@ -5400,8 +5400,8 @@
         </p:nvSpPr>
         <p:spPr>
           <a:xfrm>
-            <a:off x="3593592" y="4005072"/>
-            <a:ext cx="768096" cy="274320"/>
+            <a:off x="3534338" y="4005072"/>
+            <a:ext cx="830275" cy="274320"/>
           </a:xfrm>
           <a:prstGeom prst="rect">
             <a:avLst/>
@@ -5436,8 +5436,8 @@
         </p:nvSpPr>
         <p:spPr>
           <a:xfrm>
-            <a:off x="4608576" y="1097280"/>
-            <a:ext cx="320040" cy="2834639"/>
+            <a:off x="4529571" y="1097280"/>
+            <a:ext cx="351129" cy="2834639"/>
           </a:xfrm>
           <a:prstGeom prst="roundRect">
             <a:avLst/>
@@ -5480,8 +5480,8 @@
         </p:nvSpPr>
         <p:spPr>
           <a:xfrm>
-            <a:off x="4965192" y="1380744"/>
-            <a:ext cx="320040" cy="2551175"/>
+            <a:off x="4917277" y="1380744"/>
+            <a:ext cx="351129" cy="2551175"/>
           </a:xfrm>
           <a:prstGeom prst="roundRect">
             <a:avLst/>
@@ -5524,8 +5524,8 @@
         </p:nvSpPr>
         <p:spPr>
           <a:xfrm>
-            <a:off x="4608576" y="896112"/>
-            <a:ext cx="320040" cy="182880"/>
+            <a:off x="4529571" y="896112"/>
+            <a:ext cx="351129" cy="182880"/>
           </a:xfrm>
           <a:prstGeom prst="rect">
             <a:avLst/>
@@ -5560,8 +5560,8 @@
         </p:nvSpPr>
         <p:spPr>
           <a:xfrm>
-            <a:off x="4965192" y="1179576"/>
-            <a:ext cx="320040" cy="182880"/>
+            <a:off x="4917277" y="1179576"/>
+            <a:ext cx="351129" cy="182880"/>
           </a:xfrm>
           <a:prstGeom prst="rect">
             <a:avLst/>
@@ -5596,8 +5596,8 @@
         </p:nvSpPr>
         <p:spPr>
           <a:xfrm>
-            <a:off x="4562856" y="4005072"/>
-            <a:ext cx="768096" cy="274320"/>
+            <a:off x="4483851" y="4005072"/>
+            <a:ext cx="830275" cy="274320"/>
           </a:xfrm>
           <a:prstGeom prst="rect">
             <a:avLst/>
@@ -5632,8 +5632,8 @@
         </p:nvSpPr>
         <p:spPr>
           <a:xfrm>
-            <a:off x="5577840" y="2514600"/>
-            <a:ext cx="320040" cy="1417319"/>
+            <a:off x="5479084" y="2514600"/>
+            <a:ext cx="351129" cy="1417319"/>
           </a:xfrm>
           <a:prstGeom prst="roundRect">
             <a:avLst/>
@@ -5676,8 +5676,8 @@
         </p:nvSpPr>
         <p:spPr>
           <a:xfrm>
-            <a:off x="5934456" y="1097280"/>
-            <a:ext cx="320040" cy="2834639"/>
+            <a:off x="5866790" y="1097280"/>
+            <a:ext cx="351129" cy="2834639"/>
           </a:xfrm>
           <a:prstGeom prst="roundRect">
             <a:avLst/>
@@ -5720,8 +5720,8 @@
         </p:nvSpPr>
         <p:spPr>
           <a:xfrm>
-            <a:off x="5577840" y="2313432"/>
-            <a:ext cx="320040" cy="182880"/>
+            <a:off x="5479084" y="2313432"/>
+            <a:ext cx="351129" cy="182880"/>
           </a:xfrm>
           <a:prstGeom prst="rect">
             <a:avLst/>
@@ -5756,8 +5756,8 @@
         </p:nvSpPr>
         <p:spPr>
           <a:xfrm>
-            <a:off x="5934456" y="896112"/>
-            <a:ext cx="320040" cy="182880"/>
+            <a:off x="5866790" y="896112"/>
+            <a:ext cx="351129" cy="182880"/>
           </a:xfrm>
           <a:prstGeom prst="rect">
             <a:avLst/>
@@ -5792,8 +5792,8 @@
         </p:nvSpPr>
         <p:spPr>
           <a:xfrm>
-            <a:off x="5532120" y="4005072"/>
-            <a:ext cx="768096" cy="274320"/>
+            <a:off x="5433364" y="4005072"/>
+            <a:ext cx="830275" cy="274320"/>
           </a:xfrm>
           <a:prstGeom prst="rect">
             <a:avLst/>
